--- a/@Materi Kuliah/Materi_Matematika_Keuangan/Presentasi_Matematika_Keuangan_Profesional_dari_HTML.pptx
+++ b/@Materi Kuliah/Materi_Matematika_Keuangan/Presentasi_Matematika_Keuangan_Profesional_dari_HTML.pptx
@@ -2,131 +2,36 @@
 <file path=ppt/presentation.xml><?xml version="1.0" encoding="utf-8"?>
 <p:presentation xmlns:p="http://schemas.openxmlformats.org/presentationml/2006/main">
   <p:sldMasterIdLst>
-    <p:sldMasterId xmlns:r="http://schemas.openxmlformats.org/officeDocument/2006/relationships" id="2147483648" r:id="R99004561e3a64ba7"/>
+    <p:sldMasterId xmlns:r="http://schemas.openxmlformats.org/officeDocument/2006/relationships" id="2147483648" r:id="R45329b7296454bd4"/>
   </p:sldMasterIdLst>
   <p:notesMasterIdLst>
-    <p:notesMasterId xmlns:r="http://schemas.openxmlformats.org/officeDocument/2006/relationships" r:id="R31c4d18525004c0e"/>
+    <p:notesMasterId xmlns:r="http://schemas.openxmlformats.org/officeDocument/2006/relationships" r:id="R22843269f7eb40f3"/>
   </p:notesMasterIdLst>
   <p:sldIdLst>
-    <p:sldId xmlns:r="http://schemas.openxmlformats.org/officeDocument/2006/relationships" id="256" r:id="Rceee2b537bf44235"/>
-    <p:sldId xmlns:r="http://schemas.openxmlformats.org/officeDocument/2006/relationships" id="257" r:id="R510dd18b4baf470c"/>
-    <p:sldId xmlns:r="http://schemas.openxmlformats.org/officeDocument/2006/relationships" id="258" r:id="R482a0a82d63c4dd0"/>
-    <p:sldId xmlns:r="http://schemas.openxmlformats.org/officeDocument/2006/relationships" id="259" r:id="R0c56ff57d4284c0f"/>
-    <p:sldId xmlns:r="http://schemas.openxmlformats.org/officeDocument/2006/relationships" id="260" r:id="R585499ac74a74651"/>
-    <p:sldId xmlns:r="http://schemas.openxmlformats.org/officeDocument/2006/relationships" id="261" r:id="R841a44ed2171474d"/>
-    <p:sldId xmlns:r="http://schemas.openxmlformats.org/officeDocument/2006/relationships" id="262" r:id="Rc063574682d146ef"/>
-    <p:sldId xmlns:r="http://schemas.openxmlformats.org/officeDocument/2006/relationships" id="263" r:id="R38217bb766c04a1a"/>
-    <p:sldId xmlns:r="http://schemas.openxmlformats.org/officeDocument/2006/relationships" id="264" r:id="R4c0610eec9044ed7"/>
-    <p:sldId xmlns:r="http://schemas.openxmlformats.org/officeDocument/2006/relationships" id="265" r:id="Rbc39514a25714805"/>
-    <p:sldId xmlns:r="http://schemas.openxmlformats.org/officeDocument/2006/relationships" id="266" r:id="Rad7501de77964741"/>
-    <p:sldId xmlns:r="http://schemas.openxmlformats.org/officeDocument/2006/relationships" id="267" r:id="Rdbe3d095bd554519"/>
-    <p:sldId xmlns:r="http://schemas.openxmlformats.org/officeDocument/2006/relationships" id="268" r:id="R68f72f65eeb94a57"/>
-    <p:sldId xmlns:r="http://schemas.openxmlformats.org/officeDocument/2006/relationships" id="269" r:id="Rc71092053dcd46de"/>
-    <p:sldId xmlns:r="http://schemas.openxmlformats.org/officeDocument/2006/relationships" id="270" r:id="R23f8019c47ee4730"/>
-    <p:sldId xmlns:r="http://schemas.openxmlformats.org/officeDocument/2006/relationships" id="271" r:id="R1b91a03f574d417d"/>
-    <p:sldId xmlns:r="http://schemas.openxmlformats.org/officeDocument/2006/relationships" id="272" r:id="Rcabb2a4e6bff46ca"/>
-    <p:sldId xmlns:r="http://schemas.openxmlformats.org/officeDocument/2006/relationships" id="273" r:id="Rf71ce7b51803466c"/>
-    <p:sldId xmlns:r="http://schemas.openxmlformats.org/officeDocument/2006/relationships" id="274" r:id="R52503fc7230b4a1d"/>
-    <p:sldId xmlns:r="http://schemas.openxmlformats.org/officeDocument/2006/relationships" id="275" r:id="R682883c15b2b4323"/>
-    <p:sldId xmlns:r="http://schemas.openxmlformats.org/officeDocument/2006/relationships" id="276" r:id="Ra51df4d3729e4711"/>
+    <p:sldId xmlns:r="http://schemas.openxmlformats.org/officeDocument/2006/relationships" id="256" r:id="R830f029bccdb4423"/>
+    <p:sldId xmlns:r="http://schemas.openxmlformats.org/officeDocument/2006/relationships" id="257" r:id="Ra06adb8de05143f3"/>
+    <p:sldId xmlns:r="http://schemas.openxmlformats.org/officeDocument/2006/relationships" id="258" r:id="Rf45295bd681b45ae"/>
+    <p:sldId xmlns:r="http://schemas.openxmlformats.org/officeDocument/2006/relationships" id="259" r:id="Rec3d894203cb4b50"/>
+    <p:sldId xmlns:r="http://schemas.openxmlformats.org/officeDocument/2006/relationships" id="260" r:id="Rfe6743db9ae74b5f"/>
+    <p:sldId xmlns:r="http://schemas.openxmlformats.org/officeDocument/2006/relationships" id="261" r:id="Rbc718542e5ca490b"/>
+    <p:sldId xmlns:r="http://schemas.openxmlformats.org/officeDocument/2006/relationships" id="262" r:id="R41f237fc463d4873"/>
+    <p:sldId xmlns:r="http://schemas.openxmlformats.org/officeDocument/2006/relationships" id="263" r:id="Rcfbca37fc1e74523"/>
+    <p:sldId xmlns:r="http://schemas.openxmlformats.org/officeDocument/2006/relationships" id="264" r:id="Rbe73f63e8a654eea"/>
+    <p:sldId xmlns:r="http://schemas.openxmlformats.org/officeDocument/2006/relationships" id="265" r:id="Re75df012a26a4f92"/>
+    <p:sldId xmlns:r="http://schemas.openxmlformats.org/officeDocument/2006/relationships" id="266" r:id="R462fdc749b3e4d10"/>
+    <p:sldId xmlns:r="http://schemas.openxmlformats.org/officeDocument/2006/relationships" id="267" r:id="Rc17269b8ca914089"/>
+    <p:sldId xmlns:r="http://schemas.openxmlformats.org/officeDocument/2006/relationships" id="268" r:id="Rc8237115965941c0"/>
+    <p:sldId xmlns:r="http://schemas.openxmlformats.org/officeDocument/2006/relationships" id="269" r:id="R996240cf1c604c63"/>
+    <p:sldId xmlns:r="http://schemas.openxmlformats.org/officeDocument/2006/relationships" id="270" r:id="Ra3c484c4f3c54950"/>
+    <p:sldId xmlns:r="http://schemas.openxmlformats.org/officeDocument/2006/relationships" id="271" r:id="R5ec49f6f6eb24ba2"/>
+    <p:sldId xmlns:r="http://schemas.openxmlformats.org/officeDocument/2006/relationships" id="272" r:id="R2e01dd1e66c945e8"/>
+    <p:sldId xmlns:r="http://schemas.openxmlformats.org/officeDocument/2006/relationships" id="273" r:id="Rd3d330f7910a4a21"/>
+    <p:sldId xmlns:r="http://schemas.openxmlformats.org/officeDocument/2006/relationships" id="274" r:id="R1d512c9d5e584539"/>
+    <p:sldId xmlns:r="http://schemas.openxmlformats.org/officeDocument/2006/relationships" id="275" r:id="R2ad6841cf05f44d2"/>
+    <p:sldId xmlns:r="http://schemas.openxmlformats.org/officeDocument/2006/relationships" id="276" r:id="Rd8319504642346df"/>
   </p:sldIdLst>
   <p:sldSz cx="12192000" cy="6858000"/>
   <p:notesSz cx="6858000" cy="9144000"/>
-  <p:defaultTextStyle>
-    <a:defPPr xmlns:a="http://schemas.openxmlformats.org/drawingml/2006/main">
-      <a:defRPr lang="en-US"/>
-    </a:defPPr>
-    <a:lvl1pPr xmlns:a="http://schemas.openxmlformats.org/drawingml/2006/main" marL="0" indent="0" algn="l" defTabSz="914400">
-      <a:defRPr sz="1800" kern="1200">
-        <a:solidFill>
-          <a:schemeClr val="tx1"/>
-        </a:solidFill>
-        <a:latin typeface="+mn-lt"/>
-        <a:ea typeface="+mn-ea"/>
-        <a:cs typeface="+mn-cs"/>
-      </a:defRPr>
-    </a:lvl1pPr>
-    <a:lvl2pPr xmlns:a="http://schemas.openxmlformats.org/drawingml/2006/main" marL="457200" indent="0" algn="l" defTabSz="914400">
-      <a:defRPr sz="1800" kern="1200">
-        <a:solidFill>
-          <a:schemeClr val="tx1"/>
-        </a:solidFill>
-        <a:latin typeface="+mn-lt"/>
-        <a:ea typeface="+mn-ea"/>
-        <a:cs typeface="+mn-cs"/>
-      </a:defRPr>
-    </a:lvl2pPr>
-    <a:lvl3pPr xmlns:a="http://schemas.openxmlformats.org/drawingml/2006/main" marL="914400" indent="0" algn="l" defTabSz="914400">
-      <a:defRPr sz="1800" kern="1200">
-        <a:solidFill>
-          <a:schemeClr val="tx1"/>
-        </a:solidFill>
-        <a:latin typeface="+mn-lt"/>
-        <a:ea typeface="+mn-ea"/>
-        <a:cs typeface="+mn-cs"/>
-      </a:defRPr>
-    </a:lvl3pPr>
-    <a:lvl4pPr xmlns:a="http://schemas.openxmlformats.org/drawingml/2006/main" marL="1371600" indent="0" algn="l" defTabSz="914400">
-      <a:defRPr sz="1800" kern="1200">
-        <a:solidFill>
-          <a:schemeClr val="tx1"/>
-        </a:solidFill>
-        <a:latin typeface="+mn-lt"/>
-        <a:ea typeface="+mn-ea"/>
-        <a:cs typeface="+mn-cs"/>
-      </a:defRPr>
-    </a:lvl4pPr>
-    <a:lvl5pPr xmlns:a="http://schemas.openxmlformats.org/drawingml/2006/main" marL="1828800" indent="0" algn="l" defTabSz="914400">
-      <a:defRPr sz="1800" kern="1200">
-        <a:solidFill>
-          <a:schemeClr val="tx1"/>
-        </a:solidFill>
-        <a:latin typeface="+mn-lt"/>
-        <a:ea typeface="+mn-ea"/>
-        <a:cs typeface="+mn-cs"/>
-      </a:defRPr>
-    </a:lvl5pPr>
-    <a:lvl6pPr xmlns:a="http://schemas.openxmlformats.org/drawingml/2006/main" marL="2286000" indent="0" algn="l" defTabSz="914400">
-      <a:defRPr sz="1800" kern="1200">
-        <a:solidFill>
-          <a:schemeClr val="tx1"/>
-        </a:solidFill>
-        <a:latin typeface="+mn-lt"/>
-        <a:ea typeface="+mn-ea"/>
-        <a:cs typeface="+mn-cs"/>
-      </a:defRPr>
-    </a:lvl6pPr>
-    <a:lvl7pPr xmlns:a="http://schemas.openxmlformats.org/drawingml/2006/main" marL="2743200" indent="0" algn="l" defTabSz="914400">
-      <a:defRPr sz="1800" kern="1200">
-        <a:solidFill>
-          <a:schemeClr val="tx1"/>
-        </a:solidFill>
-        <a:latin typeface="+mn-lt"/>
-        <a:ea typeface="+mn-ea"/>
-        <a:cs typeface="+mn-cs"/>
-      </a:defRPr>
-    </a:lvl7pPr>
-    <a:lvl8pPr xmlns:a="http://schemas.openxmlformats.org/drawingml/2006/main" marL="3200400" indent="0" algn="l" defTabSz="914400">
-      <a:defRPr sz="1800" kern="1200">
-        <a:solidFill>
-          <a:schemeClr val="tx1"/>
-        </a:solidFill>
-        <a:latin typeface="+mn-lt"/>
-        <a:ea typeface="+mn-ea"/>
-        <a:cs typeface="+mn-cs"/>
-      </a:defRPr>
-    </a:lvl8pPr>
-    <a:lvl9pPr xmlns:a="http://schemas.openxmlformats.org/drawingml/2006/main" marL="3657600" indent="0" algn="l" defTabSz="914400">
-      <a:defRPr sz="1800" kern="1200">
-        <a:solidFill>
-          <a:schemeClr val="tx1"/>
-        </a:solidFill>
-        <a:latin typeface="+mn-lt"/>
-        <a:ea typeface="+mn-ea"/>
-        <a:cs typeface="+mn-cs"/>
-      </a:defRPr>
-    </a:lvl9pPr>
-  </p:defaultTextStyle>
 </p:presentation>
 </file>
 
@@ -1453,7 +1358,26 @@
         <p:txBody>
           <a:bodyPr xmlns:a="http://schemas.openxmlformats.org/drawingml/2006/main"/>
           <a:lstStyle xmlns:a="http://schemas.openxmlformats.org/drawingml/2006/main"/>
-          <a:p xmlns:a="http://schemas.openxmlformats.org/drawingml/2006/main"/>
+          <a:p xmlns:a="http://schemas.openxmlformats.org/drawingml/2006/main">
+            <a:r>
+              <a:t>[Sources]</a:t>
+            </a:r>
+          </a:p>
+          <a:p xmlns:a="http://schemas.openxmlformats.org/drawingml/2006/main">
+            <a:r>
+              <a:t>- RPS mata kuliah Revisi AI 2026, Program Studi S2 Statistika Terapan FMIPA Universitas Padjadjaran.</a:t>
+            </a:r>
+          </a:p>
+          <a:p xmlns:a="http://schemas.openxmlformats.org/drawingml/2006/main">
+            <a:r>
+              <a:t>[/Sources]</a:t>
+            </a:r>
+          </a:p>
+          <a:p xmlns:a="http://schemas.openxmlformats.org/drawingml/2006/main">
+            <a:r>
+              <a:t>Penutup: CPL tetap. AI adalah akselerator ketercapaian CPMK/Sub-CPMK, bukan pengganti penalaran statistika. Tekankan kewajiban prompt log ringkas, sumber, kode/notebook reproducible, validasi, dan audit trail.</a:t>
+            </a:r>
+          </a:p>
         </p:txBody>
       </p:sp>
       <p:sp>
@@ -2010,8 +1934,8 @@
   </p:cSld>
   <p:clrMap bg1="lt1" tx1="dk1" bg2="lt2" tx2="dk2" accent1="accent1" accent2="accent2" accent3="accent3" accent4="accent4" accent5="accent5" accent6="accent6" hlink="hlink" folHlink="folHlink"/>
   <p:sldLayoutIdLst>
-    <p:sldLayoutId xmlns:r="http://schemas.openxmlformats.org/officeDocument/2006/relationships" id="2147483649" r:id="Rda2800fceb4c4957"/>
-    <p:sldLayoutId xmlns:r="http://schemas.openxmlformats.org/officeDocument/2006/relationships" id="2147483650" r:id="Ra14ca05b7e994f9c"/>
+    <p:sldLayoutId xmlns:r="http://schemas.openxmlformats.org/officeDocument/2006/relationships" id="2147483649" r:id="Rdc56c9f92a2a4b86"/>
+    <p:sldLayoutId xmlns:r="http://schemas.openxmlformats.org/officeDocument/2006/relationships" id="2147483650" r:id="R345d9ee0814d40c7"/>
   </p:sldLayoutIdLst>
   <p:hf sldNum="0" hdr="0" ftr="0" dt="0"/>
   <p:txStyles>
@@ -2577,7 +2501,7 @@
           <p:nvPr/>
         </p:nvPicPr>
         <p:blipFill>
-          <a:blip xmlns:r="http://schemas.openxmlformats.org/officeDocument/2006/relationships" xmlns:a="http://schemas.openxmlformats.org/drawingml/2006/main" r:embed="R36d4bc88f8834e3d"/>
+          <a:blip xmlns:r="http://schemas.openxmlformats.org/officeDocument/2006/relationships" xmlns:a="http://schemas.openxmlformats.org/drawingml/2006/main" r:embed="R18d05a90693b4ee9"/>
           <a:stretch xmlns:a="http://schemas.openxmlformats.org/drawingml/2006/main">
             <a:fillRect l="0" t="0" r="0" b="0"/>
           </a:stretch>
@@ -2723,7 +2647,7 @@
           <p:nvPr/>
         </p:nvPicPr>
         <p:blipFill>
-          <a:blip xmlns:r="http://schemas.openxmlformats.org/officeDocument/2006/relationships" xmlns:a="http://schemas.openxmlformats.org/drawingml/2006/main" r:embed="R3a3fe13a42e4470b"/>
+          <a:blip xmlns:r="http://schemas.openxmlformats.org/officeDocument/2006/relationships" xmlns:a="http://schemas.openxmlformats.org/drawingml/2006/main" r:embed="R505f2e82319040e1"/>
           <a:stretch xmlns:a="http://schemas.openxmlformats.org/drawingml/2006/main">
             <a:fillRect l="0" t="0" r="0" b="0"/>
           </a:stretch>
@@ -3329,7 +3253,7 @@
           <p:nvPr/>
         </p:nvPicPr>
         <p:blipFill>
-          <a:blip xmlns:r="http://schemas.openxmlformats.org/officeDocument/2006/relationships" xmlns:a="http://schemas.openxmlformats.org/drawingml/2006/main" r:embed="Rf489aab2d85d4392"/>
+          <a:blip xmlns:r="http://schemas.openxmlformats.org/officeDocument/2006/relationships" xmlns:a="http://schemas.openxmlformats.org/drawingml/2006/main" r:embed="R355535dab06645a5"/>
           <a:stretch xmlns:a="http://schemas.openxmlformats.org/drawingml/2006/main">
             <a:fillRect l="0" t="0" r="0" b="0"/>
           </a:stretch>
@@ -5479,7 +5403,7 @@
           <p:nvPr/>
         </p:nvPicPr>
         <p:blipFill>
-          <a:blip xmlns:r="http://schemas.openxmlformats.org/officeDocument/2006/relationships" xmlns:a="http://schemas.openxmlformats.org/drawingml/2006/main" r:embed="R92084d19263b489b"/>
+          <a:blip xmlns:r="http://schemas.openxmlformats.org/officeDocument/2006/relationships" xmlns:a="http://schemas.openxmlformats.org/drawingml/2006/main" r:embed="Re1faa93da2224d80"/>
           <a:stretch xmlns:a="http://schemas.openxmlformats.org/drawingml/2006/main">
             <a:fillRect l="0" t="0" r="0" b="0"/>
           </a:stretch>
@@ -5758,7 +5682,7 @@
           <p:nvPr/>
         </p:nvPicPr>
         <p:blipFill>
-          <a:blip xmlns:r="http://schemas.openxmlformats.org/officeDocument/2006/relationships" xmlns:a="http://schemas.openxmlformats.org/drawingml/2006/main" r:embed="Rb02ea400db8543ee"/>
+          <a:blip xmlns:r="http://schemas.openxmlformats.org/officeDocument/2006/relationships" xmlns:a="http://schemas.openxmlformats.org/drawingml/2006/main" r:embed="R7dd68e829d0f4fd3"/>
           <a:stretch xmlns:a="http://schemas.openxmlformats.org/drawingml/2006/main">
             <a:fillRect l="0" t="0" r="0" b="0"/>
           </a:stretch>
@@ -7292,7 +7216,7 @@
           <p:nvPr/>
         </p:nvPicPr>
         <p:blipFill>
-          <a:blip xmlns:r="http://schemas.openxmlformats.org/officeDocument/2006/relationships" xmlns:a="http://schemas.openxmlformats.org/drawingml/2006/main" r:embed="Rc4ac700c80d44909"/>
+          <a:blip xmlns:r="http://schemas.openxmlformats.org/officeDocument/2006/relationships" xmlns:a="http://schemas.openxmlformats.org/drawingml/2006/main" r:embed="R0b5c1f4cf1e74940"/>
           <a:stretch xmlns:a="http://schemas.openxmlformats.org/drawingml/2006/main">
             <a:fillRect l="0" t="0" r="0" b="0"/>
           </a:stretch>
@@ -8461,7 +8385,7 @@
           <p:nvPr/>
         </p:nvPicPr>
         <p:blipFill>
-          <a:blip xmlns:r="http://schemas.openxmlformats.org/officeDocument/2006/relationships" xmlns:a="http://schemas.openxmlformats.org/drawingml/2006/main" r:embed="R3a72cb0c17c34054"/>
+          <a:blip xmlns:r="http://schemas.openxmlformats.org/officeDocument/2006/relationships" xmlns:a="http://schemas.openxmlformats.org/drawingml/2006/main" r:embed="R4ffc98851a7049ee"/>
           <a:stretch xmlns:a="http://schemas.openxmlformats.org/drawingml/2006/main">
             <a:fillRect l="0" t="0" r="0" b="0"/>
           </a:stretch>
@@ -9688,7 +9612,7 @@
           <p:nvPr/>
         </p:nvPicPr>
         <p:blipFill>
-          <a:blip xmlns:r="http://schemas.openxmlformats.org/officeDocument/2006/relationships" xmlns:a="http://schemas.openxmlformats.org/drawingml/2006/main" r:embed="R36691812a0ca49dc"/>
+          <a:blip xmlns:r="http://schemas.openxmlformats.org/officeDocument/2006/relationships" xmlns:a="http://schemas.openxmlformats.org/drawingml/2006/main" r:embed="Rbb20885bcbb84fae"/>
           <a:stretch xmlns:a="http://schemas.openxmlformats.org/drawingml/2006/main">
             <a:fillRect l="0" t="0" r="0" b="0"/>
           </a:stretch>
@@ -10893,7 +10817,7 @@
           <p:nvPr/>
         </p:nvPicPr>
         <p:blipFill>
-          <a:blip xmlns:r="http://schemas.openxmlformats.org/officeDocument/2006/relationships" xmlns:a="http://schemas.openxmlformats.org/drawingml/2006/main" r:embed="Rf147c53ef2ab41a4"/>
+          <a:blip xmlns:r="http://schemas.openxmlformats.org/officeDocument/2006/relationships" xmlns:a="http://schemas.openxmlformats.org/drawingml/2006/main" r:embed="R393c798606814a46"/>
           <a:stretch xmlns:a="http://schemas.openxmlformats.org/drawingml/2006/main">
             <a:fillRect l="0" t="0" r="0" b="0"/>
           </a:stretch>
@@ -11172,7 +11096,7 @@
           <p:nvPr/>
         </p:nvPicPr>
         <p:blipFill>
-          <a:blip xmlns:r="http://schemas.openxmlformats.org/officeDocument/2006/relationships" xmlns:a="http://schemas.openxmlformats.org/drawingml/2006/main" r:embed="R31be84f361df4d94"/>
+          <a:blip xmlns:r="http://schemas.openxmlformats.org/officeDocument/2006/relationships" xmlns:a="http://schemas.openxmlformats.org/drawingml/2006/main" r:embed="R1c24468f5b264798"/>
           <a:stretch xmlns:a="http://schemas.openxmlformats.org/drawingml/2006/main">
             <a:fillRect l="0" t="0" r="0" b="0"/>
           </a:stretch>
@@ -12717,7 +12641,7 @@
           <p:nvPr/>
         </p:nvPicPr>
         <p:blipFill>
-          <a:blip xmlns:r="http://schemas.openxmlformats.org/officeDocument/2006/relationships" xmlns:a="http://schemas.openxmlformats.org/drawingml/2006/main" r:embed="R459ae5ebb8e44fa9"/>
+          <a:blip xmlns:r="http://schemas.openxmlformats.org/officeDocument/2006/relationships" xmlns:a="http://schemas.openxmlformats.org/drawingml/2006/main" r:embed="R5c41db475a3a4845"/>
           <a:stretch xmlns:a="http://schemas.openxmlformats.org/drawingml/2006/main">
             <a:fillRect l="0" t="0" r="0" b="0"/>
           </a:stretch>
@@ -14734,7 +14658,7 @@
           <p:nvPr/>
         </p:nvPicPr>
         <p:blipFill>
-          <a:blip xmlns:r="http://schemas.openxmlformats.org/officeDocument/2006/relationships" xmlns:a="http://schemas.openxmlformats.org/drawingml/2006/main" r:embed="R2fb7802dd0c34455"/>
+          <a:blip xmlns:r="http://schemas.openxmlformats.org/officeDocument/2006/relationships" xmlns:a="http://schemas.openxmlformats.org/drawingml/2006/main" r:embed="R81d933b4b30149ed"/>
           <a:stretch xmlns:a="http://schemas.openxmlformats.org/drawingml/2006/main">
             <a:fillRect l="0" t="0" r="0" b="0"/>
           </a:stretch>
@@ -15961,7 +15885,7 @@
           <p:nvPr/>
         </p:nvPicPr>
         <p:blipFill>
-          <a:blip xmlns:r="http://schemas.openxmlformats.org/officeDocument/2006/relationships" xmlns:a="http://schemas.openxmlformats.org/drawingml/2006/main" r:embed="Re339f9201d234b49"/>
+          <a:blip xmlns:r="http://schemas.openxmlformats.org/officeDocument/2006/relationships" xmlns:a="http://schemas.openxmlformats.org/drawingml/2006/main" r:embed="R6ef2939d076b4ec0"/>
           <a:stretch xmlns:a="http://schemas.openxmlformats.org/drawingml/2006/main">
             <a:fillRect l="0" t="0" r="0" b="0"/>
           </a:stretch>
@@ -17102,7 +17026,7 @@
           <p:nvPr/>
         </p:nvPicPr>
         <p:blipFill>
-          <a:blip xmlns:r="http://schemas.openxmlformats.org/officeDocument/2006/relationships" xmlns:a="http://schemas.openxmlformats.org/drawingml/2006/main" r:embed="Rde7e304c4bfc4d7f"/>
+          <a:blip xmlns:r="http://schemas.openxmlformats.org/officeDocument/2006/relationships" xmlns:a="http://schemas.openxmlformats.org/drawingml/2006/main" r:embed="R81606730b4784d8c"/>
           <a:stretch xmlns:a="http://schemas.openxmlformats.org/drawingml/2006/main">
             <a:fillRect l="0" t="0" r="0" b="0"/>
           </a:stretch>
@@ -18567,7 +18491,7 @@
           <p:nvPr/>
         </p:nvPicPr>
         <p:blipFill>
-          <a:blip xmlns:r="http://schemas.openxmlformats.org/officeDocument/2006/relationships" xmlns:a="http://schemas.openxmlformats.org/drawingml/2006/main" r:embed="Rf493abf40ad640d8"/>
+          <a:blip xmlns:r="http://schemas.openxmlformats.org/officeDocument/2006/relationships" xmlns:a="http://schemas.openxmlformats.org/drawingml/2006/main" r:embed="R6274e83a453a4650"/>
           <a:stretch xmlns:a="http://schemas.openxmlformats.org/drawingml/2006/main">
             <a:fillRect l="0" t="0" r="0" b="0"/>
           </a:stretch>
@@ -18713,7 +18637,7 @@
           <p:nvPr/>
         </p:nvPicPr>
         <p:blipFill>
-          <a:blip xmlns:r="http://schemas.openxmlformats.org/officeDocument/2006/relationships" xmlns:a="http://schemas.openxmlformats.org/drawingml/2006/main" r:embed="R455e4fb2b2cf41f6"/>
+          <a:blip xmlns:r="http://schemas.openxmlformats.org/officeDocument/2006/relationships" xmlns:a="http://schemas.openxmlformats.org/drawingml/2006/main" r:embed="R0757cda33b15485e"/>
           <a:stretch xmlns:a="http://schemas.openxmlformats.org/drawingml/2006/main">
             <a:fillRect l="0" t="0" r="0" b="0"/>
           </a:stretch>
@@ -18817,7 +18741,7 @@
                 <a:ea typeface="Aptos Display"/>
                 <a:cs typeface="Aptos Display"/>
               </a:rPr>
-              <a:t>Dari data menuju</a:t>
+              <a:t>AI mempercepat proses,</a:t>
             </a:r>
           </a:p>
           <a:p xmlns:a="http://schemas.openxmlformats.org/drawingml/2006/main">
@@ -18833,7 +18757,7 @@
                 <a:ea typeface="Aptos Display"/>
                 <a:cs typeface="Aptos Display"/>
               </a:rPr>
-              <a:t>keputusan yang dapat diuji</a:t>
+              <a:t>penalaran tetap memimpin</a:t>
             </a:r>
           </a:p>
         </p:txBody>
@@ -18900,7 +18824,7 @@
         </p:spPr>
         <p:txBody>
           <a:bodyPr xmlns:a="http://schemas.openxmlformats.org/drawingml/2006/main" wrap="square" lIns="635" tIns="635" rIns="635" bIns="635" anchor="t">
-            <a:normAutofit fontScale="100000"/>
+            <a:normAutofit fontScale="93620"/>
           </a:bodyPr>
           <a:lstStyle xmlns:a="http://schemas.openxmlformats.org/drawingml/2006/main"/>
           <a:p xmlns:a="http://schemas.openxmlformats.org/drawingml/2006/main">
@@ -18916,7 +18840,7 @@
                 <a:ea typeface="Aptos"/>
                 <a:cs typeface="Aptos"/>
               </a:rPr>
-              <a:t>Matematika Keuangan menghubungkan teori, data, metode, validasi, dan komunikasi untuk menghasilkan keputusan yang sahih, dapat direplikasi, dan bertanggung jawab.</a:t>
+              <a:t>Matematika Keuangan memadukan teori, data, komputasi, validasi, dan komunikasi. AI mempercepat eksplorasi dan pemeriksaan awal; mahasiswa tetap memverifikasi asumsi, kode, hasil numerik, ketidakpastian, sumber, dan dampak sebelum mengambil keputusan.</a:t>
             </a:r>
           </a:p>
         </p:txBody>
@@ -19086,7 +19010,7 @@
           <p:nvPr/>
         </p:nvPicPr>
         <p:blipFill>
-          <a:blip xmlns:r="http://schemas.openxmlformats.org/officeDocument/2006/relationships" xmlns:a="http://schemas.openxmlformats.org/drawingml/2006/main" r:embed="Ra41cfefa40d04060"/>
+          <a:blip xmlns:r="http://schemas.openxmlformats.org/officeDocument/2006/relationships" xmlns:a="http://schemas.openxmlformats.org/drawingml/2006/main" r:embed="Rf8aa925efa5a402f"/>
           <a:stretch xmlns:a="http://schemas.openxmlformats.org/drawingml/2006/main">
             <a:fillRect l="0" t="0" r="0" b="0"/>
           </a:stretch>
@@ -20217,7 +20141,7 @@
           <p:nvPr/>
         </p:nvPicPr>
         <p:blipFill>
-          <a:blip xmlns:r="http://schemas.openxmlformats.org/officeDocument/2006/relationships" xmlns:a="http://schemas.openxmlformats.org/drawingml/2006/main" r:embed="Ra8b774682cc0401d"/>
+          <a:blip xmlns:r="http://schemas.openxmlformats.org/officeDocument/2006/relationships" xmlns:a="http://schemas.openxmlformats.org/drawingml/2006/main" r:embed="R8010932276134fc6"/>
           <a:stretch xmlns:a="http://schemas.openxmlformats.org/drawingml/2006/main">
             <a:fillRect l="0" t="0" r="0" b="0"/>
           </a:stretch>
@@ -22321,7 +22245,7 @@
           <p:nvPr/>
         </p:nvPicPr>
         <p:blipFill>
-          <a:blip xmlns:r="http://schemas.openxmlformats.org/officeDocument/2006/relationships" xmlns:a="http://schemas.openxmlformats.org/drawingml/2006/main" r:embed="R82f8a1f1d6a14fc5"/>
+          <a:blip xmlns:r="http://schemas.openxmlformats.org/officeDocument/2006/relationships" xmlns:a="http://schemas.openxmlformats.org/drawingml/2006/main" r:embed="R6e23d94dc38f4d28"/>
           <a:stretch xmlns:a="http://schemas.openxmlformats.org/drawingml/2006/main">
             <a:fillRect l="0" t="0" r="0" b="0"/>
           </a:stretch>
@@ -23603,7 +23527,7 @@
           <p:nvPr/>
         </p:nvPicPr>
         <p:blipFill>
-          <a:blip xmlns:r="http://schemas.openxmlformats.org/officeDocument/2006/relationships" xmlns:a="http://schemas.openxmlformats.org/drawingml/2006/main" r:embed="R48817ea3cec04675"/>
+          <a:blip xmlns:r="http://schemas.openxmlformats.org/officeDocument/2006/relationships" xmlns:a="http://schemas.openxmlformats.org/drawingml/2006/main" r:embed="R93b1763a40e1496a"/>
           <a:stretch xmlns:a="http://schemas.openxmlformats.org/drawingml/2006/main">
             <a:fillRect l="0" t="0" r="0" b="0"/>
           </a:stretch>
@@ -23882,7 +23806,7 @@
           <p:nvPr/>
         </p:nvPicPr>
         <p:blipFill>
-          <a:blip xmlns:r="http://schemas.openxmlformats.org/officeDocument/2006/relationships" xmlns:a="http://schemas.openxmlformats.org/drawingml/2006/main" r:embed="R37c7e0116a88452a"/>
+          <a:blip xmlns:r="http://schemas.openxmlformats.org/officeDocument/2006/relationships" xmlns:a="http://schemas.openxmlformats.org/drawingml/2006/main" r:embed="R4d678ab05267421f"/>
           <a:stretch xmlns:a="http://schemas.openxmlformats.org/drawingml/2006/main">
             <a:fillRect l="0" t="0" r="0" b="0"/>
           </a:stretch>
@@ -25962,7 +25886,7 @@
           <p:nvPr/>
         </p:nvPicPr>
         <p:blipFill>
-          <a:blip xmlns:r="http://schemas.openxmlformats.org/officeDocument/2006/relationships" xmlns:a="http://schemas.openxmlformats.org/drawingml/2006/main" r:embed="R29b680fed3d84ca9"/>
+          <a:blip xmlns:r="http://schemas.openxmlformats.org/officeDocument/2006/relationships" xmlns:a="http://schemas.openxmlformats.org/drawingml/2006/main" r:embed="Rebd8a3503ba34171"/>
           <a:stretch xmlns:a="http://schemas.openxmlformats.org/drawingml/2006/main">
             <a:fillRect l="0" t="0" r="0" b="0"/>
           </a:stretch>
@@ -27375,7 +27299,7 @@
           <p:nvPr/>
         </p:nvPicPr>
         <p:blipFill>
-          <a:blip xmlns:r="http://schemas.openxmlformats.org/officeDocument/2006/relationships" xmlns:a="http://schemas.openxmlformats.org/drawingml/2006/main" r:embed="R635cc64d166f4558"/>
+          <a:blip xmlns:r="http://schemas.openxmlformats.org/officeDocument/2006/relationships" xmlns:a="http://schemas.openxmlformats.org/drawingml/2006/main" r:embed="R64f2872ac71647ef"/>
           <a:stretch xmlns:a="http://schemas.openxmlformats.org/drawingml/2006/main">
             <a:fillRect l="0" t="0" r="0" b="0"/>
           </a:stretch>
